--- a/assets/ppts/M1.5_FTP_Protocol.pptx
+++ b/assets/ppts/M1.5_FTP_Protocol.pptx
@@ -8,6 +8,7 @@
     <p:sldId id="256" r:id="rId7"/>
     <p:sldId id="257" r:id="rId8"/>
     <p:sldId id="258" r:id="rId9"/>
+    <p:sldId id="259" r:id="rId10"/>
   </p:sldIdLst>
   <p:sldSz cx="12191695" cy="6858000" type="screen4x3"/>
   <p:notesSz cx="6858000" cy="9144000"/>
@@ -3141,8 +3142,8 @@
         </p:nvSpPr>
         <p:spPr>
           <a:xfrm>
-            <a:off x="822960" y="1188720"/>
-            <a:ext cx="164592" cy="4480560"/>
+            <a:off x="0" y="0"/>
+            <a:ext cx="12191695" cy="137160"/>
           </a:xfrm>
           <a:prstGeom prst="rect">
             <a:avLst/>
@@ -3178,14 +3179,57 @@
       </p:sp>
       <p:sp>
         <p:nvSpPr>
-          <p:cNvPr id="4" name="TextBox 3"/>
+          <p:cNvPr id="4" name="Rectangle 3"/>
+          <p:cNvSpPr/>
+          <p:nvPr/>
+        </p:nvSpPr>
+        <p:spPr>
+          <a:xfrm>
+            <a:off x="822960" y="1097280"/>
+            <a:ext cx="164592" cy="4663440"/>
+          </a:xfrm>
+          <a:prstGeom prst="rect">
+            <a:avLst/>
+          </a:prstGeom>
+          <a:solidFill>
+            <a:srgbClr val="D97706"/>
+          </a:solidFill>
+          <a:ln>
+            <a:noFill/>
+          </a:ln>
+        </p:spPr>
+        <p:style>
+          <a:lnRef idx="1">
+            <a:schemeClr val="accent1"/>
+          </a:lnRef>
+          <a:fillRef idx="3">
+            <a:schemeClr val="accent1"/>
+          </a:fillRef>
+          <a:effectRef idx="2">
+            <a:schemeClr val="accent1"/>
+          </a:effectRef>
+          <a:fontRef idx="minor">
+            <a:schemeClr val="lt1"/>
+          </a:fontRef>
+        </p:style>
+        <p:txBody>
+          <a:bodyPr rtlCol="0" anchor="ctr"/>
+          <a:lstStyle/>
+          <a:p>
+            <a:pPr algn="ctr"/>
+          </a:p>
+        </p:txBody>
+      </p:sp>
+      <p:sp>
+        <p:nvSpPr>
+          <p:cNvPr id="5" name="TextBox 4"/>
           <p:cNvSpPr txBox="1"/>
           <p:nvPr/>
         </p:nvSpPr>
         <p:spPr>
           <a:xfrm>
-            <a:off x="1280160" y="1097280"/>
-            <a:ext cx="10058400" cy="4663440"/>
+            <a:off x="1234440" y="1005840"/>
+            <a:ext cx="10241280" cy="4846320"/>
           </a:xfrm>
           <a:prstGeom prst="rect">
             <a:avLst/>
@@ -3200,70 +3244,165 @@
           <a:p>
             <a:pPr>
               <a:spcAft>
+                <a:spcPts val="1000"/>
+              </a:spcAft>
+              <a:defRPr b="1" sz="1300">
+                <a:solidFill>
+                  <a:srgbClr val="D97706"/>
+                </a:solidFill>
+              </a:defRPr>
+            </a:pPr>
+            <a:r>
+              <a:t>PCCST501 Computer Networks | KTU 2024 Scheme • MODULE 1 • M1.5</a:t>
+            </a:r>
+          </a:p>
+          <a:p>
+            <a:pPr>
+              <a:spcAft>
                 <a:spcPts val="1200"/>
               </a:spcAft>
-              <a:defRPr b="1" sz="1300">
-                <a:solidFill>
-                  <a:srgbClr val="D97706"/>
+              <a:defRPr b="1" sz="3000">
+                <a:solidFill>
+                  <a:srgbClr val="F8FAFC"/>
                 </a:solidFill>
               </a:defRPr>
             </a:pPr>
             <a:r>
-              <a:t>PCCST501 Computer Networks | KTU 2024 Scheme • MODULE 1 • M1.5</a:t>
+              <a:t>FTP (File Transfer Protocol) Architecture</a:t>
             </a:r>
           </a:p>
           <a:p>
             <a:pPr>
               <a:spcAft>
-                <a:spcPts val="1400"/>
+                <a:spcPts val="2400"/>
               </a:spcAft>
-              <a:defRPr b="1" sz="3200">
-                <a:solidFill>
-                  <a:srgbClr val="F8FAFC"/>
+              <a:defRPr sz="1600">
+                <a:solidFill>
+                  <a:srgbClr val="94A3B8"/>
                 </a:solidFill>
               </a:defRPr>
             </a:pPr>
             <a:r>
-              <a:t>File Transfer Protocol (FTP)</a:t>
+              <a:t>Out-of-Band Control vs In-Band Data, Control Port 21 vs Data Port 20, Active Mode (PORT) vs Passive Mode (PASV), Stateful Operation</a:t>
             </a:r>
           </a:p>
           <a:p>
             <a:pPr>
               <a:spcAft>
-                <a:spcPts val="2800"/>
+                <a:spcPts val="300"/>
               </a:spcAft>
-              <a:defRPr sz="1700">
+              <a:defRPr b="1" sz="1350">
+                <a:solidFill>
+                  <a:srgbClr val="E2E8F0"/>
+                </a:solidFill>
+              </a:defRPr>
+            </a:pPr>
+            <a:r>
+              <a:t>Prepared by: Prof. Anju Markose | Assistant Professor, Dept. of CSE | VJCET</a:t>
+            </a:r>
+          </a:p>
+          <a:p>
+            <a:pPr>
+              <a:defRPr sz="1150">
                 <a:solidFill>
                   <a:srgbClr val="94A3B8"/>
                 </a:solidFill>
               </a:defRPr>
             </a:pPr>
             <a:r>
-              <a:t>Dual Connection Architecture, Out-of-Band Control, Active vs Passive Mode, Commands &amp; Status Codes</a:t>
-            </a:r>
-          </a:p>
+              <a:t>Viswajyothi College of Engineering and Technology (VJCET), Vazhakulam • KTU S5 CSE</a:t>
+            </a:r>
+          </a:p>
+        </p:txBody>
+      </p:sp>
+      <p:sp>
+        <p:nvSpPr>
+          <p:cNvPr id="6" name="Rounded Rectangle 5"/>
+          <p:cNvSpPr/>
+          <p:nvPr/>
+        </p:nvSpPr>
+        <p:spPr>
+          <a:xfrm>
+            <a:off x="8412480" y="5120640"/>
+            <a:ext cx="3017520" cy="822960"/>
+          </a:xfrm>
+          <a:prstGeom prst="roundRect">
+            <a:avLst/>
+          </a:prstGeom>
+          <a:solidFill>
+            <a:srgbClr val="1E293B"/>
+          </a:solidFill>
+          <a:ln w="12700">
+            <a:solidFill>
+              <a:srgbClr val="0E7490"/>
+            </a:solidFill>
+          </a:ln>
+        </p:spPr>
+        <p:style>
+          <a:lnRef idx="1">
+            <a:schemeClr val="accent1"/>
+          </a:lnRef>
+          <a:fillRef idx="3">
+            <a:schemeClr val="accent1"/>
+          </a:fillRef>
+          <a:effectRef idx="2">
+            <a:schemeClr val="accent1"/>
+          </a:effectRef>
+          <a:fontRef idx="minor">
+            <a:schemeClr val="lt1"/>
+          </a:fontRef>
+        </p:style>
+        <p:txBody>
+          <a:bodyPr rtlCol="0" anchor="ctr"/>
+          <a:lstStyle/>
+          <a:p>
+            <a:pPr algn="ctr"/>
+          </a:p>
+        </p:txBody>
+      </p:sp>
+      <p:sp>
+        <p:nvSpPr>
+          <p:cNvPr id="7" name="TextBox 6"/>
+          <p:cNvSpPr txBox="1"/>
+          <p:nvPr/>
+        </p:nvSpPr>
+        <p:spPr>
+          <a:xfrm>
+            <a:off x="8503920" y="5166360"/>
+            <a:ext cx="2834640" cy="731520"/>
+          </a:xfrm>
+          <a:prstGeom prst="rect">
+            <a:avLst/>
+          </a:prstGeom>
+          <a:noFill/>
+        </p:spPr>
+        <p:txBody>
+          <a:bodyPr wrap="none">
+            <a:spAutoFit/>
+          </a:bodyPr>
+          <a:lstStyle/>
           <a:p>
             <a:pPr>
-              <a:defRPr b="1" sz="1300">
-                <a:solidFill>
-                  <a:srgbClr val="E2E8F0"/>
+              <a:defRPr b="1" sz="1050">
+                <a:solidFill>
+                  <a:srgbClr val="D97706"/>
                 </a:solidFill>
               </a:defRPr>
             </a:pPr>
             <a:r>
-              <a:t>Prepared by: Prof. Anju Markose | Assistant Professor, Dept. of CSE | VJCET</a:t>
+              <a:t>KTU B.Tech Curriculum</a:t>
             </a:r>
           </a:p>
           <a:p>
             <a:pPr>
-              <a:defRPr sz="1100">
-                <a:solidFill>
-                  <a:srgbClr val="94A3B8"/>
+              <a:defRPr sz="950">
+                <a:solidFill>
+                  <a:srgbClr val="F8FAFC"/>
                 </a:solidFill>
               </a:defRPr>
             </a:pPr>
             <a:r>
-              <a:t>Viswajyothi College of Engineering and Technology (VJCET), Vazhakulam</a:t>
+              <a:t>Official Classroom Slide Deck</a:t>
             </a:r>
           </a:p>
         </p:txBody>
@@ -3395,14 +3534,14 @@
           <a:lstStyle/>
           <a:p>
             <a:pPr>
-              <a:defRPr b="1" sz="2300">
+              <a:defRPr b="1" sz="2200">
                 <a:solidFill>
                   <a:srgbClr val="F8FAFC"/>
                 </a:solidFill>
               </a:defRPr>
             </a:pPr>
             <a:r>
-              <a:t>1.5.1 FTP Dual-Channel Architecture</a:t>
+              <a:t>1.5.1 Dual-Channel Architecture of FTP (RFC 959)</a:t>
             </a:r>
           </a:p>
         </p:txBody>
@@ -3450,7 +3589,7 @@
         </p:nvSpPr>
         <p:spPr>
           <a:xfrm>
-            <a:off x="731520" y="1280160"/>
+            <a:off x="731520" y="1234440"/>
             <a:ext cx="6858000" cy="4937760"/>
           </a:xfrm>
           <a:prstGeom prst="rect">
@@ -3468,29 +3607,29 @@
               <a:spcAft>
                 <a:spcPts val="200"/>
               </a:spcAft>
-              <a:defRPr b="1" sz="1500">
+              <a:defRPr b="1" sz="1450">
                 <a:solidFill>
                   <a:srgbClr val="0F1E4A"/>
                 </a:solidFill>
               </a:defRPr>
             </a:pPr>
             <a:r>
-              <a:t>• Two Parallel TCP Connections</a:t>
+              <a:t>• Out-of-Band Control Connection (Port 21)</a:t>
             </a:r>
           </a:p>
           <a:p>
             <a:pPr>
               <a:spcAft>
-                <a:spcPts val="800"/>
+                <a:spcPts val="700"/>
               </a:spcAft>
-              <a:defRPr sz="1300">
-                <a:solidFill>
-                  <a:srgbClr val="1E293B"/>
+              <a:defRPr sz="1250">
+                <a:solidFill>
+                  <a:srgbClr val="0F172A"/>
                 </a:solidFill>
               </a:defRPr>
             </a:pPr>
             <a:r>
-              <a:t>   FTP separates control signalling from actual data transfer by utilizing two distinct TCP connections.</a:t>
+              <a:t>   FTP establishes a dedicated TCP connection on port 21 solely for control commands (USER, PASS, LIST, RETR, STOR, QUIT) and server status replies (e.g., 220, 331, 230). Remains open throughout session.</a:t>
             </a:r>
           </a:p>
           <a:p>
@@ -3498,29 +3637,29 @@
               <a:spcAft>
                 <a:spcPts val="200"/>
               </a:spcAft>
-              <a:defRPr b="1" sz="1500">
+              <a:defRPr b="1" sz="1450">
                 <a:solidFill>
                   <a:srgbClr val="0F1E4A"/>
                 </a:solidFill>
               </a:defRPr>
             </a:pPr>
             <a:r>
-              <a:t>• Control Connection (Port 21)</a:t>
+              <a:t>• In-Band Data Connection (Port 20)</a:t>
             </a:r>
           </a:p>
           <a:p>
             <a:pPr>
               <a:spcAft>
-                <a:spcPts val="800"/>
+                <a:spcPts val="700"/>
               </a:spcAft>
-              <a:defRPr sz="1300">
-                <a:solidFill>
-                  <a:srgbClr val="1E293B"/>
+              <a:defRPr sz="1250">
+                <a:solidFill>
+                  <a:srgbClr val="0F172A"/>
                 </a:solidFill>
               </a:defRPr>
             </a:pPr>
             <a:r>
-              <a:t>   Client connects to server port 21. Used for sending ASCII commands (`USER`, `PASS`, `LIST`, `RETR`, `STOR`) and receiving 3-digit status codes. Remains open throughout session.</a:t>
+              <a:t>   A separate, independent TCP connection created strictly for data transfer (file upload/download, directory listings). Opened per file transfer and closed immediately upon completion.</a:t>
             </a:r>
           </a:p>
           <a:p>
@@ -3528,29 +3667,29 @@
               <a:spcAft>
                 <a:spcPts val="200"/>
               </a:spcAft>
-              <a:defRPr b="1" sz="1500">
+              <a:defRPr b="1" sz="1450">
                 <a:solidFill>
                   <a:srgbClr val="0F1E4A"/>
                 </a:solidFill>
               </a:defRPr>
             </a:pPr>
             <a:r>
-              <a:t>• Data Connection (Port 20 / Ephemeral)</a:t>
+              <a:t>• Stateful Connection</a:t>
             </a:r>
           </a:p>
           <a:p>
             <a:pPr>
               <a:spcAft>
-                <a:spcPts val="800"/>
+                <a:spcPts val="700"/>
               </a:spcAft>
-              <a:defRPr sz="1300">
-                <a:solidFill>
-                  <a:srgbClr val="1E293B"/>
+              <a:defRPr sz="1250">
+                <a:solidFill>
+                  <a:srgbClr val="0F172A"/>
                 </a:solidFill>
               </a:defRPr>
             </a:pPr>
             <a:r>
-              <a:t>   Created dynamically whenever a file transfer or directory listing is requested. Closed immediately upon file transfer completion.</a:t>
+              <a:t>   Unlike stateless HTTP, FTP servers maintain extensive session state: current working directory, authenticated user credentials, transfer mode (ASCII vs Binary), and client IP/port.</a:t>
             </a:r>
           </a:p>
           <a:p>
@@ -3558,59 +3697,29 @@
               <a:spcAft>
                 <a:spcPts val="200"/>
               </a:spcAft>
-              <a:defRPr b="1" sz="1500">
+              <a:defRPr b="1" sz="1450">
                 <a:solidFill>
                   <a:srgbClr val="0F1E4A"/>
                 </a:solidFill>
               </a:defRPr>
             </a:pPr>
             <a:r>
-              <a:t>• Out-of-Band Control</a:t>
+              <a:t>• Security Limitations of Plain FTP</a:t>
             </a:r>
           </a:p>
           <a:p>
             <a:pPr>
               <a:spcAft>
-                <a:spcPts val="800"/>
+                <a:spcPts val="700"/>
               </a:spcAft>
-              <a:defRPr sz="1300">
-                <a:solidFill>
-                  <a:srgbClr val="1E293B"/>
+              <a:defRPr sz="1250">
+                <a:solidFill>
+                  <a:srgbClr val="0F172A"/>
                 </a:solidFill>
               </a:defRPr>
             </a:pPr>
             <a:r>
-              <a:t>   Because control information is sent on a completely separate connection from data, FTP is termed an 'Out-of-Band' control protocol (unlike HTTP which is in-band).</a:t>
-            </a:r>
-          </a:p>
-          <a:p>
-            <a:pPr>
-              <a:spcAft>
-                <a:spcPts val="200"/>
-              </a:spcAft>
-              <a:defRPr b="1" sz="1500">
-                <a:solidFill>
-                  <a:srgbClr val="0F1E4A"/>
-                </a:solidFill>
-              </a:defRPr>
-            </a:pPr>
-            <a:r>
-              <a:t>• Stateful Server</a:t>
-            </a:r>
-          </a:p>
-          <a:p>
-            <a:pPr>
-              <a:spcAft>
-                <a:spcPts val="800"/>
-              </a:spcAft>
-              <a:defRPr sz="1300">
-                <a:solidFill>
-                  <a:srgbClr val="1E293B"/>
-                </a:solidFill>
-              </a:defRPr>
-            </a:pPr>
-            <a:r>
-              <a:t>   FTP server maintains state about client (current directory, authentication state, transfer parameters).</a:t>
+              <a:t>   Credentials and data transmitted in unencrypted cleartext. Modern secure alternatives: FTPS (FTP over TLS/SSL) and SFTP (SSH File Transfer Protocol).</a:t>
             </a:r>
           </a:p>
         </p:txBody>
@@ -3623,14 +3732,14 @@
         </p:nvSpPr>
         <p:spPr>
           <a:xfrm>
-            <a:off x="7955279" y="1280160"/>
-            <a:ext cx="3566160" cy="4846320"/>
+            <a:off x="7955279" y="1234440"/>
+            <a:ext cx="3566160" cy="4892040"/>
           </a:xfrm>
           <a:prstGeom prst="roundRect">
             <a:avLst/>
           </a:prstGeom>
           <a:solidFill>
-            <a:srgbClr val="F1F5F9"/>
+            <a:srgbClr val="F8FAFC"/>
           </a:solidFill>
           <a:ln w="19050">
             <a:solidFill>
@@ -3668,7 +3777,7 @@
         </p:nvSpPr>
         <p:spPr>
           <a:xfrm>
-            <a:off x="8138160" y="1417320"/>
+            <a:off x="8138160" y="1371600"/>
             <a:ext cx="3200400" cy="4572000"/>
           </a:xfrm>
           <a:prstGeom prst="rect">
@@ -3693,7 +3802,7 @@
               </a:defRPr>
             </a:pPr>
             <a:r>
-              <a:t>Key FTP Commands</a:t>
+              <a:t>FTP Commands</a:t>
             </a:r>
           </a:p>
           <a:p>
@@ -3703,12 +3812,12 @@
               </a:spcAft>
               <a:defRPr sz="1200">
                 <a:solidFill>
-                  <a:srgbClr val="1E293B"/>
+                  <a:srgbClr val="0F172A"/>
                 </a:solidFill>
               </a:defRPr>
             </a:pPr>
             <a:r>
-              <a:t>→ USER &lt;username&gt;: Login ID</a:t>
+              <a:t>→ USER / PASS: Authentication</a:t>
             </a:r>
           </a:p>
           <a:p>
@@ -3718,12 +3827,12 @@
               </a:spcAft>
               <a:defRPr sz="1200">
                 <a:solidFill>
-                  <a:srgbClr val="1E293B"/>
+                  <a:srgbClr val="0F172A"/>
                 </a:solidFill>
               </a:defRPr>
             </a:pPr>
             <a:r>
-              <a:t>→ PASS &lt;password&gt;: Auth</a:t>
+              <a:t>→ LIST: Directory listing</a:t>
             </a:r>
           </a:p>
           <a:p>
@@ -3733,12 +3842,12 @@
               </a:spcAft>
               <a:defRPr sz="1200">
                 <a:solidFill>
-                  <a:srgbClr val="1E293B"/>
+                  <a:srgbClr val="0F172A"/>
                 </a:solidFill>
               </a:defRPr>
             </a:pPr>
             <a:r>
-              <a:t>→ LIST: Request directory listing</a:t>
+              <a:t>→ RETR: Retrieve / Download file</a:t>
             </a:r>
           </a:p>
           <a:p>
@@ -3748,12 +3857,12 @@
               </a:spcAft>
               <a:defRPr sz="1200">
                 <a:solidFill>
-                  <a:srgbClr val="1E293B"/>
+                  <a:srgbClr val="0F172A"/>
                 </a:solidFill>
               </a:defRPr>
             </a:pPr>
             <a:r>
-              <a:t>→ RETR &lt;filename&gt;: Download file</a:t>
+              <a:t>→ STOR: Store / Upload file</a:t>
             </a:r>
           </a:p>
           <a:p>
@@ -3763,12 +3872,12 @@
               </a:spcAft>
               <a:defRPr sz="1200">
                 <a:solidFill>
-                  <a:srgbClr val="1E293B"/>
+                  <a:srgbClr val="0F172A"/>
                 </a:solidFill>
               </a:defRPr>
             </a:pPr>
             <a:r>
-              <a:t>→ STOR &lt;filename&gt;: Upload file</a:t>
+              <a:t>→ TYPE A / I: ASCII / Binary mode</a:t>
             </a:r>
           </a:p>
           <a:p>
@@ -3778,7 +3887,7 @@
               </a:spcAft>
               <a:defRPr sz="1200">
                 <a:solidFill>
-                  <a:srgbClr val="1E293B"/>
+                  <a:srgbClr val="0F172A"/>
                 </a:solidFill>
               </a:defRPr>
             </a:pPr>
@@ -3796,8 +3905,8 @@
         </p:nvSpPr>
         <p:spPr>
           <a:xfrm>
-            <a:off x="731520" y="6309360"/>
-            <a:ext cx="10789920" cy="365760"/>
+            <a:off x="731520" y="6327648"/>
+            <a:ext cx="10789920" cy="320040"/>
           </a:xfrm>
           <a:prstGeom prst="rect">
             <a:avLst/>
@@ -3819,6 +3928,41 @@
             </a:pPr>
             <a:r>
               <a:t>PCCST501 Computer Networks | KTU 2024 Scheme | Prof. Anju Markose | Assistant Professor, Dept. of CSE | VJCET</a:t>
+            </a:r>
+          </a:p>
+        </p:txBody>
+      </p:sp>
+      <p:sp>
+        <p:nvSpPr>
+          <p:cNvPr id="10" name="TextBox 9"/>
+          <p:cNvSpPr txBox="1"/>
+          <p:nvPr/>
+        </p:nvSpPr>
+        <p:spPr>
+          <a:xfrm>
+            <a:off x="6858000" y="6327648"/>
+            <a:ext cx="4572000" cy="320040"/>
+          </a:xfrm>
+          <a:prstGeom prst="rect">
+            <a:avLst/>
+          </a:prstGeom>
+          <a:noFill/>
+        </p:spPr>
+        <p:txBody>
+          <a:bodyPr wrap="none">
+            <a:spAutoFit/>
+          </a:bodyPr>
+          <a:lstStyle/>
+          <a:p>
+            <a:pPr algn="r">
+              <a:defRPr sz="950">
+                <a:solidFill>
+                  <a:srgbClr val="64748B"/>
+                </a:solidFill>
+              </a:defRPr>
+            </a:pPr>
+            <a:r>
+              <a:t>Dept. of CSE, VJCET</a:t>
             </a:r>
           </a:p>
         </p:txBody>
@@ -3950,14 +4094,14 @@
           <a:lstStyle/>
           <a:p>
             <a:pPr>
-              <a:defRPr b="1" sz="2300">
+              <a:defRPr b="1" sz="2200">
                 <a:solidFill>
                   <a:srgbClr val="F8FAFC"/>
                 </a:solidFill>
               </a:defRPr>
             </a:pPr>
             <a:r>
-              <a:t>1.5.2 FTP Modes: Active vs Passive (PASV)</a:t>
+              <a:t>1.5.2 Active Mode (`PORT`) vs Passive Mode (`PASV`)</a:t>
             </a:r>
           </a:p>
         </p:txBody>
@@ -4005,18 +4149,18 @@
         </p:nvSpPr>
         <p:spPr>
           <a:xfrm>
-            <a:off x="731520" y="1280160"/>
-            <a:ext cx="5212080" cy="4846320"/>
+            <a:off x="731520" y="1234440"/>
+            <a:ext cx="5212080" cy="4892040"/>
           </a:xfrm>
           <a:prstGeom prst="roundRect">
             <a:avLst/>
           </a:prstGeom>
           <a:solidFill>
-            <a:srgbClr val="F1F5F9"/>
+            <a:srgbClr val="F8FAFC"/>
           </a:solidFill>
           <a:ln w="19050">
             <a:solidFill>
-              <a:srgbClr val="0E7490"/>
+              <a:srgbClr val="0F1E4A"/>
             </a:solidFill>
           </a:ln>
         </p:spPr>
@@ -4050,7 +4194,7 @@
         </p:nvSpPr>
         <p:spPr>
           <a:xfrm>
-            <a:off x="914400" y="1417320"/>
+            <a:off x="914400" y="1371600"/>
             <a:ext cx="4846320" cy="4572000"/>
           </a:xfrm>
           <a:prstGeom prst="rect">
@@ -4066,91 +4210,76 @@
           <a:p>
             <a:pPr>
               <a:spcAft>
-                <a:spcPts val="1200"/>
+                <a:spcPts val="1000"/>
               </a:spcAft>
-              <a:defRPr b="1" sz="1600">
+              <a:defRPr b="1" sz="1550">
                 <a:solidFill>
                   <a:srgbClr val="0F1E4A"/>
                 </a:solidFill>
               </a:defRPr>
             </a:pPr>
             <a:r>
-              <a:t>Active Mode FTP (Standard)</a:t>
+              <a:t>Active Mode FTP (`PORT`)</a:t>
             </a:r>
           </a:p>
           <a:p>
             <a:pPr>
               <a:spcAft>
-                <a:spcPts val="600"/>
+                <a:spcPts val="500"/>
               </a:spcAft>
-              <a:defRPr sz="1250">
-                <a:solidFill>
-                  <a:srgbClr val="1E293B"/>
+              <a:defRPr sz="1200">
+                <a:solidFill>
+                  <a:srgbClr val="0F172A"/>
                 </a:solidFill>
               </a:defRPr>
             </a:pPr>
             <a:r>
-              <a:t>• Step 1: Client connects from port N to Server Port 21 (Control)</a:t>
+              <a:t>• Control Channel: Client connects from random port $N$ to Server Port 21</a:t>
             </a:r>
           </a:p>
           <a:p>
             <a:pPr>
               <a:spcAft>
-                <a:spcPts val="600"/>
+                <a:spcPts val="500"/>
               </a:spcAft>
-              <a:defRPr sz="1250">
-                <a:solidFill>
-                  <a:srgbClr val="1E293B"/>
+              <a:defRPr sz="1200">
+                <a:solidFill>
+                  <a:srgbClr val="0F172A"/>
                 </a:solidFill>
               </a:defRPr>
             </a:pPr>
             <a:r>
-              <a:t>• Step 2: Client sends `PORT` command telling server its IP and port M</a:t>
+              <a:t>• Data Channel Initiation: Client sends `PORT IP,p1,p2` command. Server initiates data connection from Server Port 20 to Client Port $P$</a:t>
             </a:r>
           </a:p>
           <a:p>
             <a:pPr>
               <a:spcAft>
-                <a:spcPts val="600"/>
+                <a:spcPts val="500"/>
               </a:spcAft>
-              <a:defRPr sz="1250">
-                <a:solidFill>
-                  <a:srgbClr val="1E293B"/>
+              <a:defRPr sz="1200">
+                <a:solidFill>
+                  <a:srgbClr val="0F172A"/>
                 </a:solidFill>
               </a:defRPr>
             </a:pPr>
             <a:r>
-              <a:t>• Step 3: Server initiates data connection from Port 20 to Client Port M</a:t>
+              <a:t>• Firewall Problem: Client-side firewalls and NATs block inbound connections initiated by external servers</a:t>
             </a:r>
           </a:p>
           <a:p>
             <a:pPr>
               <a:spcAft>
-                <a:spcPts val="600"/>
+                <a:spcPts val="500"/>
               </a:spcAft>
-              <a:defRPr sz="1250">
-                <a:solidFill>
-                  <a:srgbClr val="1E293B"/>
+              <a:defRPr sz="1200">
+                <a:solidFill>
+                  <a:srgbClr val="0F172A"/>
                 </a:solidFill>
               </a:defRPr>
             </a:pPr>
             <a:r>
-              <a:t>• Firewall Issue: Client-side firewall blocks incoming connection from server port 20</a:t>
-            </a:r>
-          </a:p>
-          <a:p>
-            <a:pPr>
-              <a:spcAft>
-                <a:spcPts val="600"/>
-              </a:spcAft>
-              <a:defRPr sz="1250">
-                <a:solidFill>
-                  <a:srgbClr val="1E293B"/>
-                </a:solidFill>
-              </a:defRPr>
-            </a:pPr>
-            <a:r>
-              <a:t>• Best For: Clients with direct public IP addresses</a:t>
+              <a:t>• Usage: Legacy environments without client NAT firewalls</a:t>
             </a:r>
           </a:p>
         </p:txBody>
@@ -4163,8 +4292,8 @@
         </p:nvSpPr>
         <p:spPr>
           <a:xfrm>
-            <a:off x="6309360" y="1280160"/>
-            <a:ext cx="5212080" cy="4846320"/>
+            <a:off x="6309360" y="1234440"/>
+            <a:ext cx="5212080" cy="4892040"/>
           </a:xfrm>
           <a:prstGeom prst="roundRect">
             <a:avLst/>
@@ -4174,7 +4303,7 @@
           </a:solidFill>
           <a:ln w="19050">
             <a:solidFill>
-              <a:srgbClr val="0F1E4A"/>
+              <a:srgbClr val="0E7490"/>
             </a:solidFill>
           </a:ln>
         </p:spPr>
@@ -4208,7 +4337,7 @@
         </p:nvSpPr>
         <p:spPr>
           <a:xfrm>
-            <a:off x="6492240" y="1417320"/>
+            <a:off x="6492240" y="1371600"/>
             <a:ext cx="4846320" cy="4572000"/>
           </a:xfrm>
           <a:prstGeom prst="rect">
@@ -4224,16 +4353,516 @@
           <a:p>
             <a:pPr>
               <a:spcAft>
-                <a:spcPts val="1200"/>
+                <a:spcPts val="1000"/>
               </a:spcAft>
-              <a:defRPr b="1" sz="1600">
+              <a:defRPr b="1" sz="1550">
                 <a:solidFill>
                   <a:srgbClr val="0E7490"/>
                 </a:solidFill>
               </a:defRPr>
             </a:pPr>
             <a:r>
-              <a:t>Passive Mode FTP (PASV - Modern)</a:t>
+              <a:t>Passive Mode FTP (`PASV`)</a:t>
+            </a:r>
+          </a:p>
+          <a:p>
+            <a:pPr>
+              <a:spcAft>
+                <a:spcPts val="500"/>
+              </a:spcAft>
+              <a:defRPr sz="1200">
+                <a:solidFill>
+                  <a:srgbClr val="0F172A"/>
+                </a:solidFill>
+              </a:defRPr>
+            </a:pPr>
+            <a:r>
+              <a:t>• Control Channel: Client connects from random port $N$ to Server Port 21</a:t>
+            </a:r>
+          </a:p>
+          <a:p>
+            <a:pPr>
+              <a:spcAft>
+                <a:spcPts val="500"/>
+              </a:spcAft>
+              <a:defRPr sz="1200">
+                <a:solidFill>
+                  <a:srgbClr val="0F172A"/>
+                </a:solidFill>
+              </a:defRPr>
+            </a:pPr>
+            <a:r>
+              <a:t>• Data Channel Initiation: Client sends `PASV` command. Server opens random port $M$ and replies with `227 Entering Passive Mode`</a:t>
+            </a:r>
+          </a:p>
+          <a:p>
+            <a:pPr>
+              <a:spcAft>
+                <a:spcPts val="500"/>
+              </a:spcAft>
+              <a:defRPr sz="1200">
+                <a:solidFill>
+                  <a:srgbClr val="0F172A"/>
+                </a:solidFill>
+              </a:defRPr>
+            </a:pPr>
+            <a:r>
+              <a:t>• Firewall Friendly: Client initiates outbound connection to Server Port $M$; traversable through client NATs/firewalls</a:t>
+            </a:r>
+          </a:p>
+          <a:p>
+            <a:pPr>
+              <a:spcAft>
+                <a:spcPts val="500"/>
+              </a:spcAft>
+              <a:defRPr sz="1200">
+                <a:solidFill>
+                  <a:srgbClr val="0F172A"/>
+                </a:solidFill>
+              </a:defRPr>
+            </a:pPr>
+            <a:r>
+              <a:t>• Usage: Standard default mode across modern Internet</a:t>
+            </a:r>
+          </a:p>
+        </p:txBody>
+      </p:sp>
+      <p:sp>
+        <p:nvSpPr>
+          <p:cNvPr id="10" name="TextBox 9"/>
+          <p:cNvSpPr txBox="1"/>
+          <p:nvPr/>
+        </p:nvSpPr>
+        <p:spPr>
+          <a:xfrm>
+            <a:off x="731520" y="6327648"/>
+            <a:ext cx="10789920" cy="320040"/>
+          </a:xfrm>
+          <a:prstGeom prst="rect">
+            <a:avLst/>
+          </a:prstGeom>
+          <a:noFill/>
+        </p:spPr>
+        <p:txBody>
+          <a:bodyPr wrap="none">
+            <a:spAutoFit/>
+          </a:bodyPr>
+          <a:lstStyle/>
+          <a:p>
+            <a:pPr>
+              <a:defRPr sz="950">
+                <a:solidFill>
+                  <a:srgbClr val="64748B"/>
+                </a:solidFill>
+              </a:defRPr>
+            </a:pPr>
+            <a:r>
+              <a:t>PCCST501 Computer Networks | KTU 2024 Scheme | Prof. Anju Markose | Assistant Professor, Dept. of CSE | VJCET</a:t>
+            </a:r>
+          </a:p>
+        </p:txBody>
+      </p:sp>
+      <p:sp>
+        <p:nvSpPr>
+          <p:cNvPr id="11" name="TextBox 10"/>
+          <p:cNvSpPr txBox="1"/>
+          <p:nvPr/>
+        </p:nvSpPr>
+        <p:spPr>
+          <a:xfrm>
+            <a:off x="6858000" y="6327648"/>
+            <a:ext cx="4572000" cy="320040"/>
+          </a:xfrm>
+          <a:prstGeom prst="rect">
+            <a:avLst/>
+          </a:prstGeom>
+          <a:noFill/>
+        </p:spPr>
+        <p:txBody>
+          <a:bodyPr wrap="none">
+            <a:spAutoFit/>
+          </a:bodyPr>
+          <a:lstStyle/>
+          <a:p>
+            <a:pPr algn="r">
+              <a:defRPr sz="950">
+                <a:solidFill>
+                  <a:srgbClr val="64748B"/>
+                </a:solidFill>
+              </a:defRPr>
+            </a:pPr>
+            <a:r>
+              <a:t>Dept. of CSE, VJCET</a:t>
+            </a:r>
+          </a:p>
+        </p:txBody>
+      </p:sp>
+    </p:spTree>
+  </p:cSld>
+  <p:clrMapOvr>
+    <a:masterClrMapping/>
+  </p:clrMapOvr>
+</p:sld>
+</file>
+
+<file path=ppt/slides/slide4.xml><?xml version="1.0" encoding="utf-8"?>
+<p:sld xmlns:a="http://schemas.openxmlformats.org/drawingml/2006/main" xmlns:p="http://schemas.openxmlformats.org/presentationml/2006/main" xmlns:r="http://schemas.openxmlformats.org/officeDocument/2006/relationships">
+  <p:cSld>
+    <p:spTree>
+      <p:nvGrpSpPr>
+        <p:cNvPr id="1" name=""/>
+        <p:cNvGrpSpPr/>
+        <p:nvPr/>
+      </p:nvGrpSpPr>
+      <p:grpSpPr/>
+      <p:sp>
+        <p:nvSpPr>
+          <p:cNvPr id="2" name="Rectangle 1"/>
+          <p:cNvSpPr/>
+          <p:nvPr/>
+        </p:nvSpPr>
+        <p:spPr>
+          <a:xfrm>
+            <a:off x="0" y="0"/>
+            <a:ext cx="12191695" cy="1005840"/>
+          </a:xfrm>
+          <a:prstGeom prst="rect">
+            <a:avLst/>
+          </a:prstGeom>
+          <a:solidFill>
+            <a:srgbClr val="0F1E4A"/>
+          </a:solidFill>
+          <a:ln>
+            <a:noFill/>
+          </a:ln>
+        </p:spPr>
+        <p:style>
+          <a:lnRef idx="1">
+            <a:schemeClr val="accent1"/>
+          </a:lnRef>
+          <a:fillRef idx="3">
+            <a:schemeClr val="accent1"/>
+          </a:fillRef>
+          <a:effectRef idx="2">
+            <a:schemeClr val="accent1"/>
+          </a:effectRef>
+          <a:fontRef idx="minor">
+            <a:schemeClr val="lt1"/>
+          </a:fontRef>
+        </p:style>
+        <p:txBody>
+          <a:bodyPr rtlCol="0" anchor="ctr"/>
+          <a:lstStyle/>
+          <a:p>
+            <a:pPr algn="ctr"/>
+          </a:p>
+        </p:txBody>
+      </p:sp>
+      <p:sp>
+        <p:nvSpPr>
+          <p:cNvPr id="3" name="Rectangle 2"/>
+          <p:cNvSpPr/>
+          <p:nvPr/>
+        </p:nvSpPr>
+        <p:spPr>
+          <a:xfrm>
+            <a:off x="0" y="969264"/>
+            <a:ext cx="12191695" cy="36576"/>
+          </a:xfrm>
+          <a:prstGeom prst="rect">
+            <a:avLst/>
+          </a:prstGeom>
+          <a:solidFill>
+            <a:srgbClr val="D97706"/>
+          </a:solidFill>
+          <a:ln>
+            <a:noFill/>
+          </a:ln>
+        </p:spPr>
+        <p:style>
+          <a:lnRef idx="1">
+            <a:schemeClr val="accent1"/>
+          </a:lnRef>
+          <a:fillRef idx="3">
+            <a:schemeClr val="accent1"/>
+          </a:fillRef>
+          <a:effectRef idx="2">
+            <a:schemeClr val="accent1"/>
+          </a:effectRef>
+          <a:fontRef idx="minor">
+            <a:schemeClr val="lt1"/>
+          </a:fontRef>
+        </p:style>
+        <p:txBody>
+          <a:bodyPr rtlCol="0" anchor="ctr"/>
+          <a:lstStyle/>
+          <a:p>
+            <a:pPr algn="ctr"/>
+          </a:p>
+        </p:txBody>
+      </p:sp>
+      <p:sp>
+        <p:nvSpPr>
+          <p:cNvPr id="4" name="TextBox 3"/>
+          <p:cNvSpPr txBox="1"/>
+          <p:nvPr/>
+        </p:nvSpPr>
+        <p:spPr>
+          <a:xfrm>
+            <a:off x="731520" y="164592"/>
+            <a:ext cx="8412480" cy="685800"/>
+          </a:xfrm>
+          <a:prstGeom prst="rect">
+            <a:avLst/>
+          </a:prstGeom>
+          <a:noFill/>
+        </p:spPr>
+        <p:txBody>
+          <a:bodyPr wrap="none">
+            <a:spAutoFit/>
+          </a:bodyPr>
+          <a:lstStyle/>
+          <a:p>
+            <a:pPr>
+              <a:defRPr b="1" sz="2100">
+                <a:solidFill>
+                  <a:srgbClr val="F8FAFC"/>
+                </a:solidFill>
+              </a:defRPr>
+            </a:pPr>
+            <a:r>
+              <a:t>🎯 Exam Booster &amp; Review: FTP Architecture &amp; Modes</a:t>
+            </a:r>
+          </a:p>
+        </p:txBody>
+      </p:sp>
+      <p:sp>
+        <p:nvSpPr>
+          <p:cNvPr id="5" name="TextBox 4"/>
+          <p:cNvSpPr txBox="1"/>
+          <p:nvPr/>
+        </p:nvSpPr>
+        <p:spPr>
+          <a:xfrm>
+            <a:off x="8229600" y="164592"/>
+            <a:ext cx="3291840" cy="685800"/>
+          </a:xfrm>
+          <a:prstGeom prst="rect">
+            <a:avLst/>
+          </a:prstGeom>
+          <a:noFill/>
+        </p:spPr>
+        <p:txBody>
+          <a:bodyPr wrap="none">
+            <a:spAutoFit/>
+          </a:bodyPr>
+          <a:lstStyle/>
+          <a:p>
+            <a:pPr algn="r">
+              <a:defRPr b="1" sz="1300">
+                <a:solidFill>
+                  <a:srgbClr val="D97706"/>
+                </a:solidFill>
+              </a:defRPr>
+            </a:pPr>
+            <a:r>
+              <a:t>M1.5</a:t>
+            </a:r>
+          </a:p>
+        </p:txBody>
+      </p:sp>
+      <p:sp>
+        <p:nvSpPr>
+          <p:cNvPr id="6" name="Rounded Rectangle 5"/>
+          <p:cNvSpPr/>
+          <p:nvPr/>
+        </p:nvSpPr>
+        <p:spPr>
+          <a:xfrm>
+            <a:off x="731520" y="1234440"/>
+            <a:ext cx="5303520" cy="4892040"/>
+          </a:xfrm>
+          <a:prstGeom prst="roundRect">
+            <a:avLst/>
+          </a:prstGeom>
+          <a:solidFill>
+            <a:srgbClr val="FEF3C7"/>
+          </a:solidFill>
+          <a:ln w="19050">
+            <a:solidFill>
+              <a:srgbClr val="D97706"/>
+            </a:solidFill>
+          </a:ln>
+        </p:spPr>
+        <p:style>
+          <a:lnRef idx="1">
+            <a:schemeClr val="accent1"/>
+          </a:lnRef>
+          <a:fillRef idx="3">
+            <a:schemeClr val="accent1"/>
+          </a:fillRef>
+          <a:effectRef idx="2">
+            <a:schemeClr val="accent1"/>
+          </a:effectRef>
+          <a:fontRef idx="minor">
+            <a:schemeClr val="lt1"/>
+          </a:fontRef>
+        </p:style>
+        <p:txBody>
+          <a:bodyPr rtlCol="0" anchor="ctr"/>
+          <a:lstStyle/>
+          <a:p>
+            <a:pPr algn="ctr"/>
+          </a:p>
+        </p:txBody>
+      </p:sp>
+      <p:sp>
+        <p:nvSpPr>
+          <p:cNvPr id="7" name="TextBox 6"/>
+          <p:cNvSpPr txBox="1"/>
+          <p:nvPr/>
+        </p:nvSpPr>
+        <p:spPr>
+          <a:xfrm>
+            <a:off x="914400" y="1371600"/>
+            <a:ext cx="4937760" cy="4572000"/>
+          </a:xfrm>
+          <a:prstGeom prst="rect">
+            <a:avLst/>
+          </a:prstGeom>
+          <a:noFill/>
+        </p:spPr>
+        <p:txBody>
+          <a:bodyPr wrap="square">
+            <a:spAutoFit/>
+          </a:bodyPr>
+          <a:lstStyle/>
+          <a:p>
+            <a:pPr>
+              <a:spcAft>
+                <a:spcPts val="1000"/>
+              </a:spcAft>
+              <a:defRPr b="1" sz="1450">
+                <a:solidFill>
+                  <a:srgbClr val="D97706"/>
+                </a:solidFill>
+              </a:defRPr>
+            </a:pPr>
+            <a:r>
+              <a:t>📚 KTU High-Yield Questions (K2 Understand)</a:t>
+            </a:r>
+          </a:p>
+          <a:p>
+            <a:pPr>
+              <a:spcAft>
+                <a:spcPts val="700"/>
+              </a:spcAft>
+              <a:defRPr sz="1200">
+                <a:solidFill>
+                  <a:srgbClr val="0F172A"/>
+                </a:solidFill>
+              </a:defRPr>
+            </a:pPr>
+            <a:r>
+              <a:t>Q: Explain why FTP is called an 'out-of-band' control protocol. How does it differ from HTTP? (6 Marks)</a:t>
+            </a:r>
+          </a:p>
+          <a:p>
+            <a:pPr>
+              <a:spcAft>
+                <a:spcPts val="700"/>
+              </a:spcAft>
+              <a:defRPr sz="1200">
+                <a:solidFill>
+                  <a:srgbClr val="0F172A"/>
+                </a:solidFill>
+              </a:defRPr>
+            </a:pPr>
+            <a:r>
+              <a:t>Q: Compare Active Mode and Passive Mode in FTP with step-by-step connection flow diagrams. Explain why Passive mode is preferred behind NAT firewalls. (8 Marks)</a:t>
+            </a:r>
+          </a:p>
+        </p:txBody>
+      </p:sp>
+      <p:sp>
+        <p:nvSpPr>
+          <p:cNvPr id="8" name="Rounded Rectangle 7"/>
+          <p:cNvSpPr/>
+          <p:nvPr/>
+        </p:nvSpPr>
+        <p:spPr>
+          <a:xfrm>
+            <a:off x="6309360" y="1234440"/>
+            <a:ext cx="5212080" cy="4892040"/>
+          </a:xfrm>
+          <a:prstGeom prst="roundRect">
+            <a:avLst/>
+          </a:prstGeom>
+          <a:solidFill>
+            <a:srgbClr val="EEF2FF"/>
+          </a:solidFill>
+          <a:ln w="19050">
+            <a:solidFill>
+              <a:srgbClr val="0E7490"/>
+            </a:solidFill>
+          </a:ln>
+        </p:spPr>
+        <p:style>
+          <a:lnRef idx="1">
+            <a:schemeClr val="accent1"/>
+          </a:lnRef>
+          <a:fillRef idx="3">
+            <a:schemeClr val="accent1"/>
+          </a:fillRef>
+          <a:effectRef idx="2">
+            <a:schemeClr val="accent1"/>
+          </a:effectRef>
+          <a:fontRef idx="minor">
+            <a:schemeClr val="lt1"/>
+          </a:fontRef>
+        </p:style>
+        <p:txBody>
+          <a:bodyPr rtlCol="0" anchor="ctr"/>
+          <a:lstStyle/>
+          <a:p>
+            <a:pPr algn="ctr"/>
+          </a:p>
+        </p:txBody>
+      </p:sp>
+      <p:sp>
+        <p:nvSpPr>
+          <p:cNvPr id="9" name="TextBox 8"/>
+          <p:cNvSpPr txBox="1"/>
+          <p:nvPr/>
+        </p:nvSpPr>
+        <p:spPr>
+          <a:xfrm>
+            <a:off x="6492240" y="1371600"/>
+            <a:ext cx="4846320" cy="4572000"/>
+          </a:xfrm>
+          <a:prstGeom prst="rect">
+            <a:avLst/>
+          </a:prstGeom>
+          <a:noFill/>
+        </p:spPr>
+        <p:txBody>
+          <a:bodyPr wrap="square">
+            <a:spAutoFit/>
+          </a:bodyPr>
+          <a:lstStyle/>
+          <a:p>
+            <a:pPr>
+              <a:spcAft>
+                <a:spcPts val="1000"/>
+              </a:spcAft>
+              <a:defRPr b="1" sz="1450">
+                <a:solidFill>
+                  <a:srgbClr val="0E7490"/>
+                </a:solidFill>
+              </a:defRPr>
+            </a:pPr>
+            <a:r>
+              <a:t>💡 Critical Conceptual Takeaways</a:t>
             </a:r>
           </a:p>
           <a:p>
@@ -4241,14 +4870,14 @@
               <a:spcAft>
                 <a:spcPts val="600"/>
               </a:spcAft>
-              <a:defRPr sz="1250">
-                <a:solidFill>
-                  <a:srgbClr val="1E293B"/>
+              <a:defRPr sz="1200">
+                <a:solidFill>
+                  <a:srgbClr val="0F172A"/>
                 </a:solidFill>
               </a:defRPr>
             </a:pPr>
             <a:r>
-              <a:t>• Step 1: Client connects from port N to Server Port 21 (Control)</a:t>
+              <a:t>✔ FTP separates control signaling (Port 21) from data bulk transfer (Port 20).</a:t>
             </a:r>
           </a:p>
           <a:p>
@@ -4256,14 +4885,14 @@
               <a:spcAft>
                 <a:spcPts val="600"/>
               </a:spcAft>
-              <a:defRPr sz="1250">
-                <a:solidFill>
-                  <a:srgbClr val="1E293B"/>
+              <a:defRPr sz="1200">
+                <a:solidFill>
+                  <a:srgbClr val="0F172A"/>
                 </a:solidFill>
               </a:defRPr>
             </a:pPr>
             <a:r>
-              <a:t>• Step 2: Client sends `PASV` command to server</a:t>
+              <a:t>✔ In Active mode, server connects to client (fails behind client firewalls).</a:t>
             </a:r>
           </a:p>
           <a:p>
@@ -4271,44 +4900,14 @@
               <a:spcAft>
                 <a:spcPts val="600"/>
               </a:spcAft>
-              <a:defRPr sz="1250">
-                <a:solidFill>
-                  <a:srgbClr val="1E293B"/>
+              <a:defRPr sz="1200">
+                <a:solidFill>
+                  <a:srgbClr val="0F172A"/>
                 </a:solidFill>
               </a:defRPr>
             </a:pPr>
             <a:r>
-              <a:t>• Step 3: Server opens random unprivileged port P and tells client</a:t>
-            </a:r>
-          </a:p>
-          <a:p>
-            <a:pPr>
-              <a:spcAft>
-                <a:spcPts val="600"/>
-              </a:spcAft>
-              <a:defRPr sz="1250">
-                <a:solidFill>
-                  <a:srgbClr val="1E293B"/>
-                </a:solidFill>
-              </a:defRPr>
-            </a:pPr>
-            <a:r>
-              <a:t>• Step 4: Client initiates data connection from port N+1 to Server port P</a:t>
-            </a:r>
-          </a:p>
-          <a:p>
-            <a:pPr>
-              <a:spcAft>
-                <a:spcPts val="600"/>
-              </a:spcAft>
-              <a:defRPr sz="1250">
-                <a:solidFill>
-                  <a:srgbClr val="1E293B"/>
-                </a:solidFill>
-              </a:defRPr>
-            </a:pPr>
-            <a:r>
-              <a:t>• Firewall Friendly: All connections initiated outbound by client</a:t>
+              <a:t>✔ In Passive mode, client connects to server's dynamically assigned high port (bypasses client NAT restrictions).</a:t>
             </a:r>
           </a:p>
         </p:txBody>
@@ -4321,8 +4920,8 @@
         </p:nvSpPr>
         <p:spPr>
           <a:xfrm>
-            <a:off x="731520" y="6309360"/>
-            <a:ext cx="10789920" cy="365760"/>
+            <a:off x="731520" y="6327648"/>
+            <a:ext cx="10789920" cy="320040"/>
           </a:xfrm>
           <a:prstGeom prst="rect">
             <a:avLst/>
@@ -4344,6 +4943,41 @@
             </a:pPr>
             <a:r>
               <a:t>PCCST501 Computer Networks | KTU 2024 Scheme | Prof. Anju Markose | Assistant Professor, Dept. of CSE | VJCET</a:t>
+            </a:r>
+          </a:p>
+        </p:txBody>
+      </p:sp>
+      <p:sp>
+        <p:nvSpPr>
+          <p:cNvPr id="11" name="TextBox 10"/>
+          <p:cNvSpPr txBox="1"/>
+          <p:nvPr/>
+        </p:nvSpPr>
+        <p:spPr>
+          <a:xfrm>
+            <a:off x="6858000" y="6327648"/>
+            <a:ext cx="4572000" cy="320040"/>
+          </a:xfrm>
+          <a:prstGeom prst="rect">
+            <a:avLst/>
+          </a:prstGeom>
+          <a:noFill/>
+        </p:spPr>
+        <p:txBody>
+          <a:bodyPr wrap="none">
+            <a:spAutoFit/>
+          </a:bodyPr>
+          <a:lstStyle/>
+          <a:p>
+            <a:pPr algn="r">
+              <a:defRPr sz="950">
+                <a:solidFill>
+                  <a:srgbClr val="64748B"/>
+                </a:solidFill>
+              </a:defRPr>
+            </a:pPr>
+            <a:r>
+              <a:t>Dept. of CSE, VJCET</a:t>
             </a:r>
           </a:p>
         </p:txBody>
